--- a/slides/pptx/week11.pptx
+++ b/slides/pptx/week11.pptx
@@ -1925,7 +1925,7 @@
     <p:bg>
       <p:bgPr>
         <a:solidFill>
-          <a:srgbClr val="0E1726"/>
+          <a:srgbClr val="FFFFFF"/>
         </a:solidFill>
       </p:bgPr>
     </p:bg>
@@ -1943,38 +1943,9 @@
           <a:chExt cx="0" cy="0"/>
         </a:xfrm>
       </p:grpSpPr>
-      <p:sp>
-        <p:nvSpPr>
-          <p:cNvPr id="2" name="Shape 0"/>
-          <p:cNvSpPr/>
-          <p:nvPr/>
-        </p:nvSpPr>
-        <p:spPr>
-          <a:xfrm>
-            <a:off x="603504" y="411480"/>
-            <a:ext cx="1874520" cy="932688"/>
-          </a:xfrm>
-          <a:prstGeom prst="roundRect">
-            <a:avLst>
-              <a:gd name="adj" fmla="val 7843"/>
-            </a:avLst>
-          </a:prstGeom>
-          <a:solidFill>
-            <a:srgbClr val="FFFFFF"/>
-          </a:solidFill>
-          <a:ln/>
-          <a:effectLst>
-            <a:outerShdw sx="100000" sy="100000" kx="0" ky="0" algn="bl" rotWithShape="0" blurRad="101600" dist="38100" dir="5400000">
-              <a:srgbClr val="000000">
-                <a:alpha val="35000"/>
-              </a:srgbClr>
-            </a:outerShdw>
-          </a:effectLst>
-        </p:spPr>
-      </p:sp>
       <p:pic>
         <p:nvPicPr>
-          <p:cNvPr id="3" name="Image 0" descr="/Users/pop7/Library/CloudStorage/OneDrive-MonsterConnectCo.,Ltd/Lecture/KOSEN69 - software-security/slides/pptx/assets/logo-small.png">    </p:cNvPr>
+          <p:cNvPr id="2" name="Image 0" descr="/Users/pop7/Library/CloudStorage/OneDrive-MonsterConnectCo.,Ltd/Lecture/KOSEN69 - software-security/slides/pptx/assets/logo-small.png">    </p:cNvPr>
           <p:cNvPicPr>
             <a:picLocks noChangeAspect="1"/>
           </p:cNvPicPr>
@@ -1988,8 +1959,8 @@
         </p:blipFill>
         <p:spPr>
           <a:xfrm>
-            <a:off x="758952" y="566928"/>
-            <a:ext cx="1563624" cy="621792"/>
+            <a:off x="640080" y="502920"/>
+            <a:ext cx="1691640" cy="676656"/>
           </a:xfrm>
           <a:prstGeom prst="rect">
             <a:avLst/>
@@ -1998,7 +1969,7 @@
       </p:pic>
       <p:sp>
         <p:nvSpPr>
-          <p:cNvPr id="4" name="Text 1"/>
+          <p:cNvPr id="3" name="Text 0"/>
           <p:cNvSpPr/>
           <p:nvPr/>
         </p:nvSpPr>
@@ -2037,7 +2008,7 @@
       </p:sp>
       <p:sp>
         <p:nvSpPr>
-          <p:cNvPr id="5" name="Text 2"/>
+          <p:cNvPr id="4" name="Text 1"/>
           <p:cNvSpPr/>
           <p:nvPr/>
         </p:nvSpPr>
@@ -2065,7 +2036,7 @@
             <a:r>
               <a:rPr lang="en-US" sz="4000" b="1" dirty="0">
                 <a:solidFill>
-                  <a:srgbClr val="E6EDF3"/>
+                  <a:srgbClr val="1F2937"/>
                 </a:solidFill>
                 <a:latin typeface="Arial" pitchFamily="34" charset="0"/>
                 <a:ea typeface="Arial" pitchFamily="34" charset="-122"/>
@@ -2079,7 +2050,7 @@
       </p:sp>
       <p:sp>
         <p:nvSpPr>
-          <p:cNvPr id="6" name="Text 3"/>
+          <p:cNvPr id="5" name="Text 2"/>
           <p:cNvSpPr/>
           <p:nvPr/>
         </p:nvSpPr>
@@ -2104,7 +2075,7 @@
             <a:r>
               <a:rPr lang="en-US" sz="1400" dirty="0">
                 <a:solidFill>
-                  <a:srgbClr val="94A3B8"/>
+                  <a:srgbClr val="64748B"/>
                 </a:solidFill>
                 <a:latin typeface="Calibri" pitchFamily="34" charset="0"/>
                 <a:ea typeface="Calibri" pitchFamily="34" charset="-122"/>
@@ -2130,7 +2101,7 @@
     <p:bg>
       <p:bgPr>
         <a:solidFill>
-          <a:srgbClr val="0E1726"/>
+          <a:srgbClr val="FFFFFF"/>
         </a:solidFill>
       </p:bgPr>
     </p:bg>
@@ -2167,9 +2138,9 @@
           </a:solidFill>
           <a:ln/>
           <a:effectLst>
-            <a:outerShdw sx="100000" sy="100000" kx="0" ky="0" algn="bl" rotWithShape="0" blurRad="101600" dist="38100" dir="5400000">
+            <a:outerShdw sx="100000" sy="100000" kx="0" ky="0" algn="bl" rotWithShape="0" blurRad="76200" dist="25400" dir="5400000">
               <a:srgbClr val="000000">
-                <a:alpha val="35000"/>
+                <a:alpha val="12000"/>
               </a:srgbClr>
             </a:outerShdw>
           </a:effectLst>
@@ -2226,7 +2197,7 @@
             <a:r>
               <a:rPr lang="en-US" sz="2600" b="1" dirty="0">
                 <a:solidFill>
-                  <a:srgbClr val="E6EDF3"/>
+                  <a:srgbClr val="1F2937"/>
                 </a:solidFill>
                 <a:latin typeface="Arial" pitchFamily="34" charset="0"/>
                 <a:ea typeface="Arial" pitchFamily="34" charset="-122"/>
@@ -2324,7 +2295,7 @@
             <a:r>
               <a:rPr lang="en-US" sz="1350" dirty="0">
                 <a:solidFill>
-                  <a:srgbClr val="E6EDF3"/>
+                  <a:srgbClr val="1F2937"/>
                 </a:solidFill>
                 <a:latin typeface="Calibri" pitchFamily="34" charset="0"/>
                 <a:ea typeface="Calibri" pitchFamily="34" charset="-122"/>
@@ -2422,7 +2393,7 @@
             <a:r>
               <a:rPr lang="en-US" sz="1350" dirty="0">
                 <a:solidFill>
-                  <a:srgbClr val="E6EDF3"/>
+                  <a:srgbClr val="1F2937"/>
                 </a:solidFill>
                 <a:latin typeface="Calibri" pitchFamily="34" charset="0"/>
                 <a:ea typeface="Calibri" pitchFamily="34" charset="-122"/>
@@ -2520,7 +2491,7 @@
             <a:r>
               <a:rPr lang="en-US" sz="1350" dirty="0">
                 <a:solidFill>
-                  <a:srgbClr val="E6EDF3"/>
+                  <a:srgbClr val="1F2937"/>
                 </a:solidFill>
                 <a:latin typeface="Calibri" pitchFamily="34" charset="0"/>
                 <a:ea typeface="Calibri" pitchFamily="34" charset="-122"/>
@@ -2559,7 +2530,7 @@
             <a:r>
               <a:rPr lang="en-US" sz="900" dirty="0">
                 <a:solidFill>
-                  <a:srgbClr val="94A3B8"/>
+                  <a:srgbClr val="64748B"/>
                 </a:solidFill>
                 <a:latin typeface="Calibri" pitchFamily="34" charset="0"/>
                 <a:ea typeface="Calibri" pitchFamily="34" charset="-122"/>
@@ -2571,38 +2542,9 @@
           </a:p>
         </p:txBody>
       </p:sp>
-      <p:sp>
-        <p:nvSpPr>
-          <p:cNvPr id="15" name="Shape 12"/>
-          <p:cNvSpPr/>
-          <p:nvPr/>
-        </p:nvSpPr>
-        <p:spPr>
-          <a:xfrm>
-            <a:off x="7772400" y="4590288"/>
-            <a:ext cx="969264" cy="475488"/>
-          </a:xfrm>
-          <a:prstGeom prst="roundRect">
-            <a:avLst>
-              <a:gd name="adj" fmla="val 11538"/>
-            </a:avLst>
-          </a:prstGeom>
-          <a:solidFill>
-            <a:srgbClr val="FFFFFF"/>
-          </a:solidFill>
-          <a:ln/>
-          <a:effectLst>
-            <a:outerShdw sx="100000" sy="100000" kx="0" ky="0" algn="bl" rotWithShape="0" blurRad="101600" dist="38100" dir="5400000">
-              <a:srgbClr val="000000">
-                <a:alpha val="35000"/>
-              </a:srgbClr>
-            </a:outerShdw>
-          </a:effectLst>
-        </p:spPr>
-      </p:sp>
       <p:pic>
         <p:nvPicPr>
-          <p:cNvPr id="16" name="Image 1" descr="/Users/pop7/Library/CloudStorage/OneDrive-MonsterConnectCo.,Ltd/Lecture/KOSEN69 - software-security/slides/pptx/assets/logo-small.png">    </p:cNvPr>
+          <p:cNvPr id="15" name="Image 1" descr="/Users/pop7/Library/CloudStorage/OneDrive-MonsterConnectCo.,Ltd/Lecture/KOSEN69 - software-security/slides/pptx/assets/logo-small.png">    </p:cNvPr>
           <p:cNvPicPr>
             <a:picLocks noChangeAspect="1"/>
           </p:cNvPicPr>
@@ -2616,7 +2558,7 @@
         </p:blipFill>
         <p:spPr>
           <a:xfrm>
-            <a:off x="7872984" y="4681728"/>
+            <a:off x="7882128" y="4700016"/>
             <a:ext cx="768096" cy="356616"/>
           </a:xfrm>
           <a:prstGeom prst="rect">
@@ -2638,7 +2580,7 @@
     <p:bg>
       <p:bgPr>
         <a:solidFill>
-          <a:srgbClr val="0E1726"/>
+          <a:srgbClr val="FFFFFF"/>
         </a:solidFill>
       </p:bgPr>
     </p:bg>
@@ -2675,9 +2617,9 @@
           </a:solidFill>
           <a:ln/>
           <a:effectLst>
-            <a:outerShdw sx="100000" sy="100000" kx="0" ky="0" algn="bl" rotWithShape="0" blurRad="101600" dist="38100" dir="5400000">
+            <a:outerShdw sx="100000" sy="100000" kx="0" ky="0" algn="bl" rotWithShape="0" blurRad="76200" dist="25400" dir="5400000">
               <a:srgbClr val="000000">
-                <a:alpha val="35000"/>
+                <a:alpha val="12000"/>
               </a:srgbClr>
             </a:outerShdw>
           </a:effectLst>
@@ -2734,7 +2676,7 @@
             <a:r>
               <a:rPr lang="en-US" sz="2600" b="1" dirty="0">
                 <a:solidFill>
-                  <a:srgbClr val="E6EDF3"/>
+                  <a:srgbClr val="1F2937"/>
                 </a:solidFill>
                 <a:latin typeface="Arial" pitchFamily="34" charset="0"/>
                 <a:ea typeface="Arial" pitchFamily="34" charset="-122"/>
@@ -2763,13 +2705,13 @@
             </a:avLst>
           </a:prstGeom>
           <a:solidFill>
-            <a:srgbClr val="18243A"/>
+            <a:srgbClr val="F1F5F9"/>
           </a:solidFill>
           <a:ln/>
           <a:effectLst>
-            <a:outerShdw sx="100000" sy="100000" kx="0" ky="0" algn="bl" rotWithShape="0" blurRad="101600" dist="38100" dir="5400000">
+            <a:outerShdw sx="100000" sy="100000" kx="0" ky="0" algn="bl" rotWithShape="0" blurRad="76200" dist="25400" dir="5400000">
               <a:srgbClr val="000000">
-                <a:alpha val="35000"/>
+                <a:alpha val="12000"/>
               </a:srgbClr>
             </a:outerShdw>
           </a:effectLst>
@@ -2806,7 +2748,7 @@
             <a:r>
               <a:rPr lang="en-US" sz="1400" dirty="0">
                 <a:solidFill>
-                  <a:srgbClr val="E6EDF3"/>
+                  <a:srgbClr val="1F2937"/>
                 </a:solidFill>
                 <a:latin typeface="Calibri" pitchFamily="34" charset="0"/>
                 <a:ea typeface="Calibri" pitchFamily="34" charset="-122"/>
@@ -2827,7 +2769,7 @@
             <a:r>
               <a:rPr lang="en-US" sz="1400" dirty="0">
                 <a:solidFill>
-                  <a:srgbClr val="E6EDF3"/>
+                  <a:srgbClr val="1F2937"/>
                 </a:solidFill>
                 <a:latin typeface="Calibri" pitchFamily="34" charset="0"/>
                 <a:ea typeface="Calibri" pitchFamily="34" charset="-122"/>
@@ -2848,7 +2790,7 @@
             <a:r>
               <a:rPr lang="en-US" sz="1400" dirty="0">
                 <a:solidFill>
-                  <a:srgbClr val="E6EDF3"/>
+                  <a:srgbClr val="1F2937"/>
                 </a:solidFill>
                 <a:latin typeface="Calibri" pitchFamily="34" charset="0"/>
                 <a:ea typeface="Calibri" pitchFamily="34" charset="-122"/>
@@ -2887,7 +2829,7 @@
             <a:r>
               <a:rPr lang="en-US" sz="900" dirty="0">
                 <a:solidFill>
-                  <a:srgbClr val="94A3B8"/>
+                  <a:srgbClr val="64748B"/>
                 </a:solidFill>
                 <a:latin typeface="Calibri" pitchFamily="34" charset="0"/>
                 <a:ea typeface="Calibri" pitchFamily="34" charset="-122"/>
@@ -2899,38 +2841,9 @@
           </a:p>
         </p:txBody>
       </p:sp>
-      <p:sp>
-        <p:nvSpPr>
-          <p:cNvPr id="8" name="Shape 5"/>
-          <p:cNvSpPr/>
-          <p:nvPr/>
-        </p:nvSpPr>
-        <p:spPr>
-          <a:xfrm>
-            <a:off x="7772400" y="4590288"/>
-            <a:ext cx="969264" cy="475488"/>
-          </a:xfrm>
-          <a:prstGeom prst="roundRect">
-            <a:avLst>
-              <a:gd name="adj" fmla="val 11538"/>
-            </a:avLst>
-          </a:prstGeom>
-          <a:solidFill>
-            <a:srgbClr val="FFFFFF"/>
-          </a:solidFill>
-          <a:ln/>
-          <a:effectLst>
-            <a:outerShdw sx="100000" sy="100000" kx="0" ky="0" algn="bl" rotWithShape="0" blurRad="101600" dist="38100" dir="5400000">
-              <a:srgbClr val="000000">
-                <a:alpha val="35000"/>
-              </a:srgbClr>
-            </a:outerShdw>
-          </a:effectLst>
-        </p:spPr>
-      </p:sp>
       <p:pic>
         <p:nvPicPr>
-          <p:cNvPr id="9" name="Image 1" descr="/Users/pop7/Library/CloudStorage/OneDrive-MonsterConnectCo.,Ltd/Lecture/KOSEN69 - software-security/slides/pptx/assets/logo-small.png">    </p:cNvPr>
+          <p:cNvPr id="8" name="Image 1" descr="/Users/pop7/Library/CloudStorage/OneDrive-MonsterConnectCo.,Ltd/Lecture/KOSEN69 - software-security/slides/pptx/assets/logo-small.png">    </p:cNvPr>
           <p:cNvPicPr>
             <a:picLocks noChangeAspect="1"/>
           </p:cNvPicPr>
@@ -2944,7 +2857,7 @@
         </p:blipFill>
         <p:spPr>
           <a:xfrm>
-            <a:off x="7872984" y="4681728"/>
+            <a:off x="7882128" y="4700016"/>
             <a:ext cx="768096" cy="356616"/>
           </a:xfrm>
           <a:prstGeom prst="rect">
@@ -2966,7 +2879,7 @@
     <p:bg>
       <p:bgPr>
         <a:solidFill>
-          <a:srgbClr val="0E1726"/>
+          <a:srgbClr val="FFFFFF"/>
         </a:solidFill>
       </p:bgPr>
     </p:bg>
@@ -3003,9 +2916,9 @@
           </a:solidFill>
           <a:ln/>
           <a:effectLst>
-            <a:outerShdw sx="100000" sy="100000" kx="0" ky="0" algn="bl" rotWithShape="0" blurRad="101600" dist="38100" dir="5400000">
+            <a:outerShdw sx="100000" sy="100000" kx="0" ky="0" algn="bl" rotWithShape="0" blurRad="76200" dist="25400" dir="5400000">
               <a:srgbClr val="000000">
-                <a:alpha val="35000"/>
+                <a:alpha val="12000"/>
               </a:srgbClr>
             </a:outerShdw>
           </a:effectLst>
@@ -3062,7 +2975,7 @@
             <a:r>
               <a:rPr lang="en-US" sz="2600" b="1" dirty="0">
                 <a:solidFill>
-                  <a:srgbClr val="E6EDF3"/>
+                  <a:srgbClr val="1F2937"/>
                 </a:solidFill>
                 <a:latin typeface="Arial" pitchFamily="34" charset="0"/>
                 <a:ea typeface="Arial" pitchFamily="34" charset="-122"/>
@@ -3091,13 +3004,13 @@
             </a:avLst>
           </a:prstGeom>
           <a:solidFill>
-            <a:srgbClr val="18243A"/>
+            <a:srgbClr val="F1F5F9"/>
           </a:solidFill>
           <a:ln/>
           <a:effectLst>
-            <a:outerShdw sx="100000" sy="100000" kx="0" ky="0" algn="bl" rotWithShape="0" blurRad="101600" dist="38100" dir="5400000">
+            <a:outerShdw sx="100000" sy="100000" kx="0" ky="0" algn="bl" rotWithShape="0" blurRad="76200" dist="25400" dir="5400000">
               <a:srgbClr val="000000">
-                <a:alpha val="35000"/>
+                <a:alpha val="12000"/>
               </a:srgbClr>
             </a:outerShdw>
           </a:effectLst>
@@ -3134,7 +3047,7 @@
             <a:r>
               <a:rPr lang="en-US" sz="1400" dirty="0">
                 <a:solidFill>
-                  <a:srgbClr val="E6EDF3"/>
+                  <a:srgbClr val="1F2937"/>
                 </a:solidFill>
                 <a:latin typeface="Calibri" pitchFamily="34" charset="0"/>
                 <a:ea typeface="Calibri" pitchFamily="34" charset="-122"/>
@@ -3155,7 +3068,7 @@
             <a:r>
               <a:rPr lang="en-US" sz="1400" dirty="0">
                 <a:solidFill>
-                  <a:srgbClr val="E6EDF3"/>
+                  <a:srgbClr val="1F2937"/>
                 </a:solidFill>
                 <a:latin typeface="Calibri" pitchFamily="34" charset="0"/>
                 <a:ea typeface="Calibri" pitchFamily="34" charset="-122"/>
@@ -3176,7 +3089,7 @@
             <a:r>
               <a:rPr lang="en-US" sz="1400" dirty="0">
                 <a:solidFill>
-                  <a:srgbClr val="E6EDF3"/>
+                  <a:srgbClr val="1F2937"/>
                 </a:solidFill>
                 <a:latin typeface="Calibri" pitchFamily="34" charset="0"/>
                 <a:ea typeface="Calibri" pitchFamily="34" charset="-122"/>
@@ -3215,7 +3128,7 @@
             <a:r>
               <a:rPr lang="en-US" sz="900" dirty="0">
                 <a:solidFill>
-                  <a:srgbClr val="94A3B8"/>
+                  <a:srgbClr val="64748B"/>
                 </a:solidFill>
                 <a:latin typeface="Calibri" pitchFamily="34" charset="0"/>
                 <a:ea typeface="Calibri" pitchFamily="34" charset="-122"/>
@@ -3227,38 +3140,9 @@
           </a:p>
         </p:txBody>
       </p:sp>
-      <p:sp>
-        <p:nvSpPr>
-          <p:cNvPr id="8" name="Shape 5"/>
-          <p:cNvSpPr/>
-          <p:nvPr/>
-        </p:nvSpPr>
-        <p:spPr>
-          <a:xfrm>
-            <a:off x="7772400" y="4590288"/>
-            <a:ext cx="969264" cy="475488"/>
-          </a:xfrm>
-          <a:prstGeom prst="roundRect">
-            <a:avLst>
-              <a:gd name="adj" fmla="val 11538"/>
-            </a:avLst>
-          </a:prstGeom>
-          <a:solidFill>
-            <a:srgbClr val="FFFFFF"/>
-          </a:solidFill>
-          <a:ln/>
-          <a:effectLst>
-            <a:outerShdw sx="100000" sy="100000" kx="0" ky="0" algn="bl" rotWithShape="0" blurRad="101600" dist="38100" dir="5400000">
-              <a:srgbClr val="000000">
-                <a:alpha val="35000"/>
-              </a:srgbClr>
-            </a:outerShdw>
-          </a:effectLst>
-        </p:spPr>
-      </p:sp>
       <p:pic>
         <p:nvPicPr>
-          <p:cNvPr id="9" name="Image 1" descr="/Users/pop7/Library/CloudStorage/OneDrive-MonsterConnectCo.,Ltd/Lecture/KOSEN69 - software-security/slides/pptx/assets/logo-small.png">    </p:cNvPr>
+          <p:cNvPr id="8" name="Image 1" descr="/Users/pop7/Library/CloudStorage/OneDrive-MonsterConnectCo.,Ltd/Lecture/KOSEN69 - software-security/slides/pptx/assets/logo-small.png">    </p:cNvPr>
           <p:cNvPicPr>
             <a:picLocks noChangeAspect="1"/>
           </p:cNvPicPr>
@@ -3272,7 +3156,7 @@
         </p:blipFill>
         <p:spPr>
           <a:xfrm>
-            <a:off x="7872984" y="4681728"/>
+            <a:off x="7882128" y="4700016"/>
             <a:ext cx="768096" cy="356616"/>
           </a:xfrm>
           <a:prstGeom prst="rect">
@@ -3294,7 +3178,7 @@
     <p:bg>
       <p:bgPr>
         <a:solidFill>
-          <a:srgbClr val="0E1726"/>
+          <a:srgbClr val="FFFFFF"/>
         </a:solidFill>
       </p:bgPr>
     </p:bg>
@@ -3339,7 +3223,7 @@
             <a:r>
               <a:rPr lang="en-US" sz="4600" b="1" dirty="0">
                 <a:solidFill>
-                  <a:srgbClr val="E6EDF3"/>
+                  <a:srgbClr val="1F2937"/>
                 </a:solidFill>
                 <a:latin typeface="Arial" pitchFamily="34" charset="0"/>
                 <a:ea typeface="Arial" pitchFamily="34" charset="-122"/>
@@ -3390,38 +3274,9 @@
           </a:p>
         </p:txBody>
       </p:sp>
-      <p:sp>
-        <p:nvSpPr>
-          <p:cNvPr id="4" name="Shape 2"/>
-          <p:cNvSpPr/>
-          <p:nvPr/>
-        </p:nvSpPr>
-        <p:spPr>
-          <a:xfrm>
-            <a:off x="7772400" y="4590288"/>
-            <a:ext cx="969264" cy="475488"/>
-          </a:xfrm>
-          <a:prstGeom prst="roundRect">
-            <a:avLst>
-              <a:gd name="adj" fmla="val 11538"/>
-            </a:avLst>
-          </a:prstGeom>
-          <a:solidFill>
-            <a:srgbClr val="FFFFFF"/>
-          </a:solidFill>
-          <a:ln/>
-          <a:effectLst>
-            <a:outerShdw sx="100000" sy="100000" kx="0" ky="0" algn="bl" rotWithShape="0" blurRad="101600" dist="38100" dir="5400000">
-              <a:srgbClr val="000000">
-                <a:alpha val="35000"/>
-              </a:srgbClr>
-            </a:outerShdw>
-          </a:effectLst>
-        </p:spPr>
-      </p:sp>
       <p:pic>
         <p:nvPicPr>
-          <p:cNvPr id="5" name="Image 0" descr="/Users/pop7/Library/CloudStorage/OneDrive-MonsterConnectCo.,Ltd/Lecture/KOSEN69 - software-security/slides/pptx/assets/logo-small.png">    </p:cNvPr>
+          <p:cNvPr id="4" name="Image 0" descr="/Users/pop7/Library/CloudStorage/OneDrive-MonsterConnectCo.,Ltd/Lecture/KOSEN69 - software-security/slides/pptx/assets/logo-small.png">    </p:cNvPr>
           <p:cNvPicPr>
             <a:picLocks noChangeAspect="1"/>
           </p:cNvPicPr>
@@ -3435,7 +3290,7 @@
         </p:blipFill>
         <p:spPr>
           <a:xfrm>
-            <a:off x="7872984" y="4681728"/>
+            <a:off x="7882128" y="4700016"/>
             <a:ext cx="768096" cy="356616"/>
           </a:xfrm>
           <a:prstGeom prst="rect">
@@ -3457,7 +3312,7 @@
     <p:bg>
       <p:bgPr>
         <a:solidFill>
-          <a:srgbClr val="0E1726"/>
+          <a:srgbClr val="FFFFFF"/>
         </a:solidFill>
       </p:bgPr>
     </p:bg>
@@ -3494,9 +3349,9 @@
           </a:solidFill>
           <a:ln/>
           <a:effectLst>
-            <a:outerShdw sx="100000" sy="100000" kx="0" ky="0" algn="bl" rotWithShape="0" blurRad="101600" dist="38100" dir="5400000">
+            <a:outerShdw sx="100000" sy="100000" kx="0" ky="0" algn="bl" rotWithShape="0" blurRad="76200" dist="25400" dir="5400000">
               <a:srgbClr val="000000">
-                <a:alpha val="35000"/>
+                <a:alpha val="12000"/>
               </a:srgbClr>
             </a:outerShdw>
           </a:effectLst>
@@ -3553,7 +3408,7 @@
             <a:r>
               <a:rPr lang="en-US" sz="2600" b="1" dirty="0">
                 <a:solidFill>
-                  <a:srgbClr val="E6EDF3"/>
+                  <a:srgbClr val="1F2937"/>
                 </a:solidFill>
                 <a:latin typeface="Arial" pitchFamily="34" charset="0"/>
                 <a:ea typeface="Arial" pitchFamily="34" charset="-122"/>
@@ -3582,13 +3437,13 @@
             </a:avLst>
           </a:prstGeom>
           <a:solidFill>
-            <a:srgbClr val="18243A"/>
+            <a:srgbClr val="F1F5F9"/>
           </a:solidFill>
           <a:ln/>
           <a:effectLst>
-            <a:outerShdw sx="100000" sy="100000" kx="0" ky="0" algn="bl" rotWithShape="0" blurRad="101600" dist="38100" dir="5400000">
+            <a:outerShdw sx="100000" sy="100000" kx="0" ky="0" algn="bl" rotWithShape="0" blurRad="76200" dist="25400" dir="5400000">
               <a:srgbClr val="000000">
-                <a:alpha val="35000"/>
+                <a:alpha val="12000"/>
               </a:srgbClr>
             </a:outerShdw>
           </a:effectLst>
@@ -3625,7 +3480,7 @@
             <a:r>
               <a:rPr lang="en-US" sz="1400" dirty="0">
                 <a:solidFill>
-                  <a:srgbClr val="E6EDF3"/>
+                  <a:srgbClr val="1F2937"/>
                 </a:solidFill>
                 <a:latin typeface="Calibri" pitchFamily="34" charset="0"/>
                 <a:ea typeface="Calibri" pitchFamily="34" charset="-122"/>
@@ -3646,7 +3501,7 @@
             <a:r>
               <a:rPr lang="en-US" sz="1400" dirty="0">
                 <a:solidFill>
-                  <a:srgbClr val="E6EDF3"/>
+                  <a:srgbClr val="1F2937"/>
                 </a:solidFill>
                 <a:latin typeface="Calibri" pitchFamily="34" charset="0"/>
                 <a:ea typeface="Calibri" pitchFamily="34" charset="-122"/>
@@ -3667,7 +3522,7 @@
             <a:r>
               <a:rPr lang="en-US" sz="1400" dirty="0">
                 <a:solidFill>
-                  <a:srgbClr val="E6EDF3"/>
+                  <a:srgbClr val="1F2937"/>
                 </a:solidFill>
                 <a:latin typeface="Calibri" pitchFamily="34" charset="0"/>
                 <a:ea typeface="Calibri" pitchFamily="34" charset="-122"/>
@@ -3688,7 +3543,7 @@
             <a:r>
               <a:rPr lang="en-US" sz="1400" dirty="0">
                 <a:solidFill>
-                  <a:srgbClr val="E6EDF3"/>
+                  <a:srgbClr val="1F2937"/>
                 </a:solidFill>
                 <a:latin typeface="Calibri" pitchFamily="34" charset="0"/>
                 <a:ea typeface="Calibri" pitchFamily="34" charset="-122"/>
@@ -3709,7 +3564,7 @@
             <a:r>
               <a:rPr lang="en-US" sz="1400" dirty="0">
                 <a:solidFill>
-                  <a:srgbClr val="E6EDF3"/>
+                  <a:srgbClr val="1F2937"/>
                 </a:solidFill>
                 <a:latin typeface="Calibri" pitchFamily="34" charset="0"/>
                 <a:ea typeface="Calibri" pitchFamily="34" charset="-122"/>
@@ -3748,7 +3603,7 @@
             <a:r>
               <a:rPr lang="en-US" sz="900" dirty="0">
                 <a:solidFill>
-                  <a:srgbClr val="94A3B8"/>
+                  <a:srgbClr val="64748B"/>
                 </a:solidFill>
                 <a:latin typeface="Calibri" pitchFamily="34" charset="0"/>
                 <a:ea typeface="Calibri" pitchFamily="34" charset="-122"/>
@@ -3760,38 +3615,9 @@
           </a:p>
         </p:txBody>
       </p:sp>
-      <p:sp>
-        <p:nvSpPr>
-          <p:cNvPr id="8" name="Shape 5"/>
-          <p:cNvSpPr/>
-          <p:nvPr/>
-        </p:nvSpPr>
-        <p:spPr>
-          <a:xfrm>
-            <a:off x="7772400" y="4590288"/>
-            <a:ext cx="969264" cy="475488"/>
-          </a:xfrm>
-          <a:prstGeom prst="roundRect">
-            <a:avLst>
-              <a:gd name="adj" fmla="val 11538"/>
-            </a:avLst>
-          </a:prstGeom>
-          <a:solidFill>
-            <a:srgbClr val="FFFFFF"/>
-          </a:solidFill>
-          <a:ln/>
-          <a:effectLst>
-            <a:outerShdw sx="100000" sy="100000" kx="0" ky="0" algn="bl" rotWithShape="0" blurRad="101600" dist="38100" dir="5400000">
-              <a:srgbClr val="000000">
-                <a:alpha val="35000"/>
-              </a:srgbClr>
-            </a:outerShdw>
-          </a:effectLst>
-        </p:spPr>
-      </p:sp>
       <p:pic>
         <p:nvPicPr>
-          <p:cNvPr id="9" name="Image 1" descr="/Users/pop7/Library/CloudStorage/OneDrive-MonsterConnectCo.,Ltd/Lecture/KOSEN69 - software-security/slides/pptx/assets/logo-small.png">    </p:cNvPr>
+          <p:cNvPr id="8" name="Image 1" descr="/Users/pop7/Library/CloudStorage/OneDrive-MonsterConnectCo.,Ltd/Lecture/KOSEN69 - software-security/slides/pptx/assets/logo-small.png">    </p:cNvPr>
           <p:cNvPicPr>
             <a:picLocks noChangeAspect="1"/>
           </p:cNvPicPr>
@@ -3805,7 +3631,7 @@
         </p:blipFill>
         <p:spPr>
           <a:xfrm>
-            <a:off x="7872984" y="4681728"/>
+            <a:off x="7882128" y="4700016"/>
             <a:ext cx="768096" cy="356616"/>
           </a:xfrm>
           <a:prstGeom prst="rect">
@@ -3827,7 +3653,7 @@
     <p:bg>
       <p:bgPr>
         <a:solidFill>
-          <a:srgbClr val="0E1726"/>
+          <a:srgbClr val="FFFFFF"/>
         </a:solidFill>
       </p:bgPr>
     </p:bg>
@@ -3864,9 +3690,9 @@
           </a:solidFill>
           <a:ln/>
           <a:effectLst>
-            <a:outerShdw sx="100000" sy="100000" kx="0" ky="0" algn="bl" rotWithShape="0" blurRad="101600" dist="38100" dir="5400000">
+            <a:outerShdw sx="100000" sy="100000" kx="0" ky="0" algn="bl" rotWithShape="0" blurRad="76200" dist="25400" dir="5400000">
               <a:srgbClr val="000000">
-                <a:alpha val="35000"/>
+                <a:alpha val="12000"/>
               </a:srgbClr>
             </a:outerShdw>
           </a:effectLst>
@@ -3923,7 +3749,7 @@
             <a:r>
               <a:rPr lang="en-US" sz="2600" b="1" dirty="0">
                 <a:solidFill>
-                  <a:srgbClr val="E6EDF3"/>
+                  <a:srgbClr val="1F2937"/>
                 </a:solidFill>
                 <a:latin typeface="Arial" pitchFamily="34" charset="0"/>
                 <a:ea typeface="Arial" pitchFamily="34" charset="-122"/>
@@ -3952,13 +3778,13 @@
             </a:avLst>
           </a:prstGeom>
           <a:solidFill>
-            <a:srgbClr val="18243A"/>
+            <a:srgbClr val="F1F5F9"/>
           </a:solidFill>
           <a:ln/>
           <a:effectLst>
-            <a:outerShdw sx="100000" sy="100000" kx="0" ky="0" algn="bl" rotWithShape="0" blurRad="101600" dist="38100" dir="5400000">
+            <a:outerShdw sx="100000" sy="100000" kx="0" ky="0" algn="bl" rotWithShape="0" blurRad="76200" dist="25400" dir="5400000">
               <a:srgbClr val="000000">
-                <a:alpha val="35000"/>
+                <a:alpha val="12000"/>
               </a:srgbClr>
             </a:outerShdw>
           </a:effectLst>
@@ -3995,7 +3821,7 @@
             <a:r>
               <a:rPr lang="en-US" sz="1400" dirty="0">
                 <a:solidFill>
-                  <a:srgbClr val="E6EDF3"/>
+                  <a:srgbClr val="1F2937"/>
                 </a:solidFill>
                 <a:latin typeface="Calibri" pitchFamily="34" charset="0"/>
                 <a:ea typeface="Calibri" pitchFamily="34" charset="-122"/>
@@ -4016,7 +3842,7 @@
             <a:r>
               <a:rPr lang="en-US" sz="1400" dirty="0">
                 <a:solidFill>
-                  <a:srgbClr val="E6EDF3"/>
+                  <a:srgbClr val="1F2937"/>
                 </a:solidFill>
                 <a:latin typeface="Calibri" pitchFamily="34" charset="0"/>
                 <a:ea typeface="Calibri" pitchFamily="34" charset="-122"/>
@@ -4037,7 +3863,7 @@
             <a:r>
               <a:rPr lang="en-US" sz="1400" dirty="0">
                 <a:solidFill>
-                  <a:srgbClr val="E6EDF3"/>
+                  <a:srgbClr val="1F2937"/>
                 </a:solidFill>
                 <a:latin typeface="Calibri" pitchFamily="34" charset="0"/>
                 <a:ea typeface="Calibri" pitchFamily="34" charset="-122"/>
@@ -4076,7 +3902,7 @@
             <a:r>
               <a:rPr lang="en-US" sz="900" dirty="0">
                 <a:solidFill>
-                  <a:srgbClr val="94A3B8"/>
+                  <a:srgbClr val="64748B"/>
                 </a:solidFill>
                 <a:latin typeface="Calibri" pitchFamily="34" charset="0"/>
                 <a:ea typeface="Calibri" pitchFamily="34" charset="-122"/>
@@ -4088,38 +3914,9 @@
           </a:p>
         </p:txBody>
       </p:sp>
-      <p:sp>
-        <p:nvSpPr>
-          <p:cNvPr id="8" name="Shape 5"/>
-          <p:cNvSpPr/>
-          <p:nvPr/>
-        </p:nvSpPr>
-        <p:spPr>
-          <a:xfrm>
-            <a:off x="7772400" y="4590288"/>
-            <a:ext cx="969264" cy="475488"/>
-          </a:xfrm>
-          <a:prstGeom prst="roundRect">
-            <a:avLst>
-              <a:gd name="adj" fmla="val 11538"/>
-            </a:avLst>
-          </a:prstGeom>
-          <a:solidFill>
-            <a:srgbClr val="FFFFFF"/>
-          </a:solidFill>
-          <a:ln/>
-          <a:effectLst>
-            <a:outerShdw sx="100000" sy="100000" kx="0" ky="0" algn="bl" rotWithShape="0" blurRad="101600" dist="38100" dir="5400000">
-              <a:srgbClr val="000000">
-                <a:alpha val="35000"/>
-              </a:srgbClr>
-            </a:outerShdw>
-          </a:effectLst>
-        </p:spPr>
-      </p:sp>
       <p:pic>
         <p:nvPicPr>
-          <p:cNvPr id="9" name="Image 1" descr="/Users/pop7/Library/CloudStorage/OneDrive-MonsterConnectCo.,Ltd/Lecture/KOSEN69 - software-security/slides/pptx/assets/logo-small.png">    </p:cNvPr>
+          <p:cNvPr id="8" name="Image 1" descr="/Users/pop7/Library/CloudStorage/OneDrive-MonsterConnectCo.,Ltd/Lecture/KOSEN69 - software-security/slides/pptx/assets/logo-small.png">    </p:cNvPr>
           <p:cNvPicPr>
             <a:picLocks noChangeAspect="1"/>
           </p:cNvPicPr>
@@ -4133,7 +3930,7 @@
         </p:blipFill>
         <p:spPr>
           <a:xfrm>
-            <a:off x="7872984" y="4681728"/>
+            <a:off x="7882128" y="4700016"/>
             <a:ext cx="768096" cy="356616"/>
           </a:xfrm>
           <a:prstGeom prst="rect">
@@ -4155,7 +3952,7 @@
     <p:bg>
       <p:bgPr>
         <a:solidFill>
-          <a:srgbClr val="0E1726"/>
+          <a:srgbClr val="FFFFFF"/>
         </a:solidFill>
       </p:bgPr>
     </p:bg>
@@ -4192,9 +3989,9 @@
           </a:solidFill>
           <a:ln/>
           <a:effectLst>
-            <a:outerShdw sx="100000" sy="100000" kx="0" ky="0" algn="bl" rotWithShape="0" blurRad="101600" dist="38100" dir="5400000">
+            <a:outerShdw sx="100000" sy="100000" kx="0" ky="0" algn="bl" rotWithShape="0" blurRad="76200" dist="25400" dir="5400000">
               <a:srgbClr val="000000">
-                <a:alpha val="35000"/>
+                <a:alpha val="12000"/>
               </a:srgbClr>
             </a:outerShdw>
           </a:effectLst>
@@ -4251,7 +4048,7 @@
             <a:r>
               <a:rPr lang="en-US" sz="2600" b="1" dirty="0">
                 <a:solidFill>
-                  <a:srgbClr val="E6EDF3"/>
+                  <a:srgbClr val="1F2937"/>
                 </a:solidFill>
                 <a:latin typeface="Arial" pitchFamily="34" charset="0"/>
                 <a:ea typeface="Arial" pitchFamily="34" charset="-122"/>
@@ -4284,7 +4081,7 @@
           </a:solidFill>
           <a:ln w="12700">
             <a:solidFill>
-              <a:srgbClr val="1E2B45"/>
+              <a:srgbClr val="E8EDF3"/>
             </a:solidFill>
             <a:prstDash val="solid"/>
           </a:ln>
@@ -4363,13 +4160,13 @@
             </a:avLst>
           </a:prstGeom>
           <a:solidFill>
-            <a:srgbClr val="18243A"/>
+            <a:srgbClr val="F1F5F9"/>
           </a:solidFill>
           <a:ln/>
           <a:effectLst>
-            <a:outerShdw sx="100000" sy="100000" kx="0" ky="0" algn="bl" rotWithShape="0" blurRad="101600" dist="38100" dir="5400000">
+            <a:outerShdw sx="100000" sy="100000" kx="0" ky="0" algn="bl" rotWithShape="0" blurRad="76200" dist="25400" dir="5400000">
               <a:srgbClr val="000000">
-                <a:alpha val="35000"/>
+                <a:alpha val="12000"/>
               </a:srgbClr>
             </a:outerShdw>
           </a:effectLst>
@@ -4406,7 +4203,7 @@
             <a:r>
               <a:rPr lang="en-US" sz="1400" dirty="0">
                 <a:solidFill>
-                  <a:srgbClr val="E6EDF3"/>
+                  <a:srgbClr val="1F2937"/>
                 </a:solidFill>
                 <a:latin typeface="Calibri" pitchFamily="34" charset="0"/>
                 <a:ea typeface="Calibri" pitchFamily="34" charset="-122"/>
@@ -4427,7 +4224,7 @@
             <a:r>
               <a:rPr lang="en-US" sz="1400" dirty="0">
                 <a:solidFill>
-                  <a:srgbClr val="E6EDF3"/>
+                  <a:srgbClr val="1F2937"/>
                 </a:solidFill>
                 <a:latin typeface="Calibri" pitchFamily="34" charset="0"/>
                 <a:ea typeface="Calibri" pitchFamily="34" charset="-122"/>
@@ -4466,7 +4263,7 @@
             <a:r>
               <a:rPr lang="en-US" sz="900" dirty="0">
                 <a:solidFill>
-                  <a:srgbClr val="94A3B8"/>
+                  <a:srgbClr val="64748B"/>
                 </a:solidFill>
                 <a:latin typeface="Calibri" pitchFamily="34" charset="0"/>
                 <a:ea typeface="Calibri" pitchFamily="34" charset="-122"/>
@@ -4478,38 +4275,9 @@
           </a:p>
         </p:txBody>
       </p:sp>
-      <p:sp>
-        <p:nvSpPr>
-          <p:cNvPr id="10" name="Shape 7"/>
-          <p:cNvSpPr/>
-          <p:nvPr/>
-        </p:nvSpPr>
-        <p:spPr>
-          <a:xfrm>
-            <a:off x="7772400" y="4590288"/>
-            <a:ext cx="969264" cy="475488"/>
-          </a:xfrm>
-          <a:prstGeom prst="roundRect">
-            <a:avLst>
-              <a:gd name="adj" fmla="val 11538"/>
-            </a:avLst>
-          </a:prstGeom>
-          <a:solidFill>
-            <a:srgbClr val="FFFFFF"/>
-          </a:solidFill>
-          <a:ln/>
-          <a:effectLst>
-            <a:outerShdw sx="100000" sy="100000" kx="0" ky="0" algn="bl" rotWithShape="0" blurRad="101600" dist="38100" dir="5400000">
-              <a:srgbClr val="000000">
-                <a:alpha val="35000"/>
-              </a:srgbClr>
-            </a:outerShdw>
-          </a:effectLst>
-        </p:spPr>
-      </p:sp>
       <p:pic>
         <p:nvPicPr>
-          <p:cNvPr id="11" name="Image 1" descr="/Users/pop7/Library/CloudStorage/OneDrive-MonsterConnectCo.,Ltd/Lecture/KOSEN69 - software-security/slides/pptx/assets/logo-small.png">    </p:cNvPr>
+          <p:cNvPr id="10" name="Image 1" descr="/Users/pop7/Library/CloudStorage/OneDrive-MonsterConnectCo.,Ltd/Lecture/KOSEN69 - software-security/slides/pptx/assets/logo-small.png">    </p:cNvPr>
           <p:cNvPicPr>
             <a:picLocks noChangeAspect="1"/>
           </p:cNvPicPr>
@@ -4523,7 +4291,7 @@
         </p:blipFill>
         <p:spPr>
           <a:xfrm>
-            <a:off x="7872984" y="4681728"/>
+            <a:off x="7882128" y="4700016"/>
             <a:ext cx="768096" cy="356616"/>
           </a:xfrm>
           <a:prstGeom prst="rect">
@@ -4545,7 +4313,7 @@
     <p:bg>
       <p:bgPr>
         <a:solidFill>
-          <a:srgbClr val="0E1726"/>
+          <a:srgbClr val="FFFFFF"/>
         </a:solidFill>
       </p:bgPr>
     </p:bg>
@@ -4582,9 +4350,9 @@
           </a:solidFill>
           <a:ln/>
           <a:effectLst>
-            <a:outerShdw sx="100000" sy="100000" kx="0" ky="0" algn="bl" rotWithShape="0" blurRad="101600" dist="38100" dir="5400000">
+            <a:outerShdw sx="100000" sy="100000" kx="0" ky="0" algn="bl" rotWithShape="0" blurRad="76200" dist="25400" dir="5400000">
               <a:srgbClr val="000000">
-                <a:alpha val="35000"/>
+                <a:alpha val="12000"/>
               </a:srgbClr>
             </a:outerShdw>
           </a:effectLst>
@@ -4641,7 +4409,7 @@
             <a:r>
               <a:rPr lang="en-US" sz="2600" b="1" dirty="0">
                 <a:solidFill>
-                  <a:srgbClr val="E6EDF3"/>
+                  <a:srgbClr val="1F2937"/>
                 </a:solidFill>
                 <a:latin typeface="Arial" pitchFamily="34" charset="0"/>
                 <a:ea typeface="Arial" pitchFamily="34" charset="-122"/>
@@ -4670,13 +4438,13 @@
             </a:avLst>
           </a:prstGeom>
           <a:solidFill>
-            <a:srgbClr val="18243A"/>
+            <a:srgbClr val="F1F5F9"/>
           </a:solidFill>
           <a:ln/>
           <a:effectLst>
-            <a:outerShdw sx="100000" sy="100000" kx="0" ky="0" algn="bl" rotWithShape="0" blurRad="101600" dist="38100" dir="5400000">
+            <a:outerShdw sx="100000" sy="100000" kx="0" ky="0" algn="bl" rotWithShape="0" blurRad="76200" dist="25400" dir="5400000">
               <a:srgbClr val="000000">
-                <a:alpha val="35000"/>
+                <a:alpha val="12000"/>
               </a:srgbClr>
             </a:outerShdw>
           </a:effectLst>
@@ -4713,7 +4481,7 @@
             <a:r>
               <a:rPr lang="en-US" sz="1400" dirty="0">
                 <a:solidFill>
-                  <a:srgbClr val="E6EDF3"/>
+                  <a:srgbClr val="1F2937"/>
                 </a:solidFill>
                 <a:latin typeface="Calibri" pitchFamily="34" charset="0"/>
                 <a:ea typeface="Calibri" pitchFamily="34" charset="-122"/>
@@ -4734,7 +4502,7 @@
             <a:r>
               <a:rPr lang="en-US" sz="1400" dirty="0">
                 <a:solidFill>
-                  <a:srgbClr val="E6EDF3"/>
+                  <a:srgbClr val="1F2937"/>
                 </a:solidFill>
                 <a:latin typeface="Calibri" pitchFamily="34" charset="0"/>
                 <a:ea typeface="Calibri" pitchFamily="34" charset="-122"/>
@@ -4755,7 +4523,7 @@
             <a:r>
               <a:rPr lang="en-US" sz="1400" dirty="0">
                 <a:solidFill>
-                  <a:srgbClr val="E6EDF3"/>
+                  <a:srgbClr val="1F2937"/>
                 </a:solidFill>
                 <a:latin typeface="Calibri" pitchFamily="34" charset="0"/>
                 <a:ea typeface="Calibri" pitchFamily="34" charset="-122"/>
@@ -4794,7 +4562,7 @@
             <a:r>
               <a:rPr lang="en-US" sz="900" dirty="0">
                 <a:solidFill>
-                  <a:srgbClr val="94A3B8"/>
+                  <a:srgbClr val="64748B"/>
                 </a:solidFill>
                 <a:latin typeface="Calibri" pitchFamily="34" charset="0"/>
                 <a:ea typeface="Calibri" pitchFamily="34" charset="-122"/>
@@ -4806,38 +4574,9 @@
           </a:p>
         </p:txBody>
       </p:sp>
-      <p:sp>
-        <p:nvSpPr>
-          <p:cNvPr id="8" name="Shape 5"/>
-          <p:cNvSpPr/>
-          <p:nvPr/>
-        </p:nvSpPr>
-        <p:spPr>
-          <a:xfrm>
-            <a:off x="7772400" y="4590288"/>
-            <a:ext cx="969264" cy="475488"/>
-          </a:xfrm>
-          <a:prstGeom prst="roundRect">
-            <a:avLst>
-              <a:gd name="adj" fmla="val 11538"/>
-            </a:avLst>
-          </a:prstGeom>
-          <a:solidFill>
-            <a:srgbClr val="FFFFFF"/>
-          </a:solidFill>
-          <a:ln/>
-          <a:effectLst>
-            <a:outerShdw sx="100000" sy="100000" kx="0" ky="0" algn="bl" rotWithShape="0" blurRad="101600" dist="38100" dir="5400000">
-              <a:srgbClr val="000000">
-                <a:alpha val="35000"/>
-              </a:srgbClr>
-            </a:outerShdw>
-          </a:effectLst>
-        </p:spPr>
-      </p:sp>
       <p:pic>
         <p:nvPicPr>
-          <p:cNvPr id="9" name="Image 1" descr="/Users/pop7/Library/CloudStorage/OneDrive-MonsterConnectCo.,Ltd/Lecture/KOSEN69 - software-security/slides/pptx/assets/logo-small.png">    </p:cNvPr>
+          <p:cNvPr id="8" name="Image 1" descr="/Users/pop7/Library/CloudStorage/OneDrive-MonsterConnectCo.,Ltd/Lecture/KOSEN69 - software-security/slides/pptx/assets/logo-small.png">    </p:cNvPr>
           <p:cNvPicPr>
             <a:picLocks noChangeAspect="1"/>
           </p:cNvPicPr>
@@ -4851,7 +4590,7 @@
         </p:blipFill>
         <p:spPr>
           <a:xfrm>
-            <a:off x="7872984" y="4681728"/>
+            <a:off x="7882128" y="4700016"/>
             <a:ext cx="768096" cy="356616"/>
           </a:xfrm>
           <a:prstGeom prst="rect">
@@ -4873,7 +4612,7 @@
     <p:bg>
       <p:bgPr>
         <a:solidFill>
-          <a:srgbClr val="0E1726"/>
+          <a:srgbClr val="FFFFFF"/>
         </a:solidFill>
       </p:bgPr>
     </p:bg>
@@ -4910,9 +4649,9 @@
           </a:solidFill>
           <a:ln/>
           <a:effectLst>
-            <a:outerShdw sx="100000" sy="100000" kx="0" ky="0" algn="bl" rotWithShape="0" blurRad="101600" dist="38100" dir="5400000">
+            <a:outerShdw sx="100000" sy="100000" kx="0" ky="0" algn="bl" rotWithShape="0" blurRad="76200" dist="25400" dir="5400000">
               <a:srgbClr val="000000">
-                <a:alpha val="35000"/>
+                <a:alpha val="12000"/>
               </a:srgbClr>
             </a:outerShdw>
           </a:effectLst>
@@ -4969,7 +4708,7 @@
             <a:r>
               <a:rPr lang="en-US" sz="2600" b="1" dirty="0">
                 <a:solidFill>
-                  <a:srgbClr val="E6EDF3"/>
+                  <a:srgbClr val="1F2937"/>
                 </a:solidFill>
                 <a:latin typeface="Arial" pitchFamily="34" charset="0"/>
                 <a:ea typeface="Arial" pitchFamily="34" charset="-122"/>
@@ -5002,7 +4741,7 @@
           </a:solidFill>
           <a:ln w="12700">
             <a:solidFill>
-              <a:srgbClr val="1E2B45"/>
+              <a:srgbClr val="E8EDF3"/>
             </a:solidFill>
             <a:prstDash val="solid"/>
           </a:ln>
@@ -5081,13 +4820,13 @@
             </a:avLst>
           </a:prstGeom>
           <a:solidFill>
-            <a:srgbClr val="18243A"/>
+            <a:srgbClr val="F1F5F9"/>
           </a:solidFill>
           <a:ln/>
           <a:effectLst>
-            <a:outerShdw sx="100000" sy="100000" kx="0" ky="0" algn="bl" rotWithShape="0" blurRad="101600" dist="38100" dir="5400000">
+            <a:outerShdw sx="100000" sy="100000" kx="0" ky="0" algn="bl" rotWithShape="0" blurRad="76200" dist="25400" dir="5400000">
               <a:srgbClr val="000000">
-                <a:alpha val="35000"/>
+                <a:alpha val="12000"/>
               </a:srgbClr>
             </a:outerShdw>
           </a:effectLst>
@@ -5124,7 +4863,7 @@
             <a:r>
               <a:rPr lang="en-US" sz="1400" dirty="0">
                 <a:solidFill>
-                  <a:srgbClr val="E6EDF3"/>
+                  <a:srgbClr val="1F2937"/>
                 </a:solidFill>
                 <a:latin typeface="Calibri" pitchFamily="34" charset="0"/>
                 <a:ea typeface="Calibri" pitchFamily="34" charset="-122"/>
@@ -5145,7 +4884,7 @@
             <a:r>
               <a:rPr lang="en-US" sz="1400" dirty="0">
                 <a:solidFill>
-                  <a:srgbClr val="E6EDF3"/>
+                  <a:srgbClr val="1F2937"/>
                 </a:solidFill>
                 <a:latin typeface="Calibri" pitchFamily="34" charset="0"/>
                 <a:ea typeface="Calibri" pitchFamily="34" charset="-122"/>
@@ -5184,7 +4923,7 @@
             <a:r>
               <a:rPr lang="en-US" sz="900" dirty="0">
                 <a:solidFill>
-                  <a:srgbClr val="94A3B8"/>
+                  <a:srgbClr val="64748B"/>
                 </a:solidFill>
                 <a:latin typeface="Calibri" pitchFamily="34" charset="0"/>
                 <a:ea typeface="Calibri" pitchFamily="34" charset="-122"/>
@@ -5196,38 +4935,9 @@
           </a:p>
         </p:txBody>
       </p:sp>
-      <p:sp>
-        <p:nvSpPr>
-          <p:cNvPr id="10" name="Shape 7"/>
-          <p:cNvSpPr/>
-          <p:nvPr/>
-        </p:nvSpPr>
-        <p:spPr>
-          <a:xfrm>
-            <a:off x="7772400" y="4590288"/>
-            <a:ext cx="969264" cy="475488"/>
-          </a:xfrm>
-          <a:prstGeom prst="roundRect">
-            <a:avLst>
-              <a:gd name="adj" fmla="val 11538"/>
-            </a:avLst>
-          </a:prstGeom>
-          <a:solidFill>
-            <a:srgbClr val="FFFFFF"/>
-          </a:solidFill>
-          <a:ln/>
-          <a:effectLst>
-            <a:outerShdw sx="100000" sy="100000" kx="0" ky="0" algn="bl" rotWithShape="0" blurRad="101600" dist="38100" dir="5400000">
-              <a:srgbClr val="000000">
-                <a:alpha val="35000"/>
-              </a:srgbClr>
-            </a:outerShdw>
-          </a:effectLst>
-        </p:spPr>
-      </p:sp>
       <p:pic>
         <p:nvPicPr>
-          <p:cNvPr id="11" name="Image 1" descr="/Users/pop7/Library/CloudStorage/OneDrive-MonsterConnectCo.,Ltd/Lecture/KOSEN69 - software-security/slides/pptx/assets/logo-small.png">    </p:cNvPr>
+          <p:cNvPr id="10" name="Image 1" descr="/Users/pop7/Library/CloudStorage/OneDrive-MonsterConnectCo.,Ltd/Lecture/KOSEN69 - software-security/slides/pptx/assets/logo-small.png">    </p:cNvPr>
           <p:cNvPicPr>
             <a:picLocks noChangeAspect="1"/>
           </p:cNvPicPr>
@@ -5241,7 +4951,7 @@
         </p:blipFill>
         <p:spPr>
           <a:xfrm>
-            <a:off x="7872984" y="4681728"/>
+            <a:off x="7882128" y="4700016"/>
             <a:ext cx="768096" cy="356616"/>
           </a:xfrm>
           <a:prstGeom prst="rect">
@@ -5263,7 +4973,7 @@
     <p:bg>
       <p:bgPr>
         <a:solidFill>
-          <a:srgbClr val="0E1726"/>
+          <a:srgbClr val="FFFFFF"/>
         </a:solidFill>
       </p:bgPr>
     </p:bg>
@@ -5300,9 +5010,9 @@
           </a:solidFill>
           <a:ln/>
           <a:effectLst>
-            <a:outerShdw sx="100000" sy="100000" kx="0" ky="0" algn="bl" rotWithShape="0" blurRad="101600" dist="38100" dir="5400000">
+            <a:outerShdw sx="100000" sy="100000" kx="0" ky="0" algn="bl" rotWithShape="0" blurRad="76200" dist="25400" dir="5400000">
               <a:srgbClr val="000000">
-                <a:alpha val="35000"/>
+                <a:alpha val="12000"/>
               </a:srgbClr>
             </a:outerShdw>
           </a:effectLst>
@@ -5359,7 +5069,7 @@
             <a:r>
               <a:rPr lang="en-US" sz="2600" b="1" dirty="0">
                 <a:solidFill>
-                  <a:srgbClr val="E6EDF3"/>
+                  <a:srgbClr val="1F2937"/>
                 </a:solidFill>
                 <a:latin typeface="Arial" pitchFamily="34" charset="0"/>
                 <a:ea typeface="Arial" pitchFamily="34" charset="-122"/>
@@ -5457,7 +5167,7 @@
             <a:r>
               <a:rPr lang="en-US" sz="1350" dirty="0">
                 <a:solidFill>
-                  <a:srgbClr val="E6EDF3"/>
+                  <a:srgbClr val="1F2937"/>
                 </a:solidFill>
                 <a:latin typeface="Calibri" pitchFamily="34" charset="0"/>
                 <a:ea typeface="Calibri" pitchFamily="34" charset="-122"/>
@@ -5555,7 +5265,7 @@
             <a:r>
               <a:rPr lang="en-US" sz="1350" dirty="0">
                 <a:solidFill>
-                  <a:srgbClr val="E6EDF3"/>
+                  <a:srgbClr val="1F2937"/>
                 </a:solidFill>
                 <a:latin typeface="Calibri" pitchFamily="34" charset="0"/>
                 <a:ea typeface="Calibri" pitchFamily="34" charset="-122"/>
@@ -5653,7 +5363,7 @@
             <a:r>
               <a:rPr lang="en-US" sz="1350" dirty="0">
                 <a:solidFill>
-                  <a:srgbClr val="E6EDF3"/>
+                  <a:srgbClr val="1F2937"/>
                 </a:solidFill>
                 <a:latin typeface="Calibri" pitchFamily="34" charset="0"/>
                 <a:ea typeface="Calibri" pitchFamily="34" charset="-122"/>
@@ -5692,7 +5402,7 @@
             <a:r>
               <a:rPr lang="en-US" sz="900" dirty="0">
                 <a:solidFill>
-                  <a:srgbClr val="94A3B8"/>
+                  <a:srgbClr val="64748B"/>
                 </a:solidFill>
                 <a:latin typeface="Calibri" pitchFamily="34" charset="0"/>
                 <a:ea typeface="Calibri" pitchFamily="34" charset="-122"/>
@@ -5704,38 +5414,9 @@
           </a:p>
         </p:txBody>
       </p:sp>
-      <p:sp>
-        <p:nvSpPr>
-          <p:cNvPr id="15" name="Shape 12"/>
-          <p:cNvSpPr/>
-          <p:nvPr/>
-        </p:nvSpPr>
-        <p:spPr>
-          <a:xfrm>
-            <a:off x="7772400" y="4590288"/>
-            <a:ext cx="969264" cy="475488"/>
-          </a:xfrm>
-          <a:prstGeom prst="roundRect">
-            <a:avLst>
-              <a:gd name="adj" fmla="val 11538"/>
-            </a:avLst>
-          </a:prstGeom>
-          <a:solidFill>
-            <a:srgbClr val="FFFFFF"/>
-          </a:solidFill>
-          <a:ln/>
-          <a:effectLst>
-            <a:outerShdw sx="100000" sy="100000" kx="0" ky="0" algn="bl" rotWithShape="0" blurRad="101600" dist="38100" dir="5400000">
-              <a:srgbClr val="000000">
-                <a:alpha val="35000"/>
-              </a:srgbClr>
-            </a:outerShdw>
-          </a:effectLst>
-        </p:spPr>
-      </p:sp>
       <p:pic>
         <p:nvPicPr>
-          <p:cNvPr id="16" name="Image 1" descr="/Users/pop7/Library/CloudStorage/OneDrive-MonsterConnectCo.,Ltd/Lecture/KOSEN69 - software-security/slides/pptx/assets/logo-small.png">    </p:cNvPr>
+          <p:cNvPr id="15" name="Image 1" descr="/Users/pop7/Library/CloudStorage/OneDrive-MonsterConnectCo.,Ltd/Lecture/KOSEN69 - software-security/slides/pptx/assets/logo-small.png">    </p:cNvPr>
           <p:cNvPicPr>
             <a:picLocks noChangeAspect="1"/>
           </p:cNvPicPr>
@@ -5749,7 +5430,7 @@
         </p:blipFill>
         <p:spPr>
           <a:xfrm>
-            <a:off x="7872984" y="4681728"/>
+            <a:off x="7882128" y="4700016"/>
             <a:ext cx="768096" cy="356616"/>
           </a:xfrm>
           <a:prstGeom prst="rect">
@@ -5771,7 +5452,7 @@
     <p:bg>
       <p:bgPr>
         <a:solidFill>
-          <a:srgbClr val="0E1726"/>
+          <a:srgbClr val="FFFFFF"/>
         </a:solidFill>
       </p:bgPr>
     </p:bg>
@@ -5808,9 +5489,9 @@
           </a:solidFill>
           <a:ln/>
           <a:effectLst>
-            <a:outerShdw sx="100000" sy="100000" kx="0" ky="0" algn="bl" rotWithShape="0" blurRad="101600" dist="38100" dir="5400000">
+            <a:outerShdw sx="100000" sy="100000" kx="0" ky="0" algn="bl" rotWithShape="0" blurRad="76200" dist="25400" dir="5400000">
               <a:srgbClr val="000000">
-                <a:alpha val="35000"/>
+                <a:alpha val="12000"/>
               </a:srgbClr>
             </a:outerShdw>
           </a:effectLst>
@@ -5867,7 +5548,7 @@
             <a:r>
               <a:rPr lang="en-US" sz="2600" b="1" dirty="0">
                 <a:solidFill>
-                  <a:srgbClr val="E6EDF3"/>
+                  <a:srgbClr val="1F2937"/>
                 </a:solidFill>
                 <a:latin typeface="Arial" pitchFamily="34" charset="0"/>
                 <a:ea typeface="Arial" pitchFamily="34" charset="-122"/>
@@ -5896,13 +5577,13 @@
             </a:avLst>
           </a:prstGeom>
           <a:solidFill>
-            <a:srgbClr val="18243A"/>
+            <a:srgbClr val="F1F5F9"/>
           </a:solidFill>
           <a:ln/>
           <a:effectLst>
-            <a:outerShdw sx="100000" sy="100000" kx="0" ky="0" algn="bl" rotWithShape="0" blurRad="101600" dist="38100" dir="5400000">
+            <a:outerShdw sx="100000" sy="100000" kx="0" ky="0" algn="bl" rotWithShape="0" blurRad="76200" dist="25400" dir="5400000">
               <a:srgbClr val="000000">
-                <a:alpha val="35000"/>
+                <a:alpha val="12000"/>
               </a:srgbClr>
             </a:outerShdw>
           </a:effectLst>
@@ -5939,7 +5620,7 @@
             <a:r>
               <a:rPr lang="en-US" sz="1400" dirty="0">
                 <a:solidFill>
-                  <a:srgbClr val="E6EDF3"/>
+                  <a:srgbClr val="1F2937"/>
                 </a:solidFill>
                 <a:latin typeface="Calibri" pitchFamily="34" charset="0"/>
                 <a:ea typeface="Calibri" pitchFamily="34" charset="-122"/>
@@ -5960,7 +5641,7 @@
             <a:r>
               <a:rPr lang="en-US" sz="1400" dirty="0">
                 <a:solidFill>
-                  <a:srgbClr val="E6EDF3"/>
+                  <a:srgbClr val="1F2937"/>
                 </a:solidFill>
                 <a:latin typeface="Calibri" pitchFamily="34" charset="0"/>
                 <a:ea typeface="Calibri" pitchFamily="34" charset="-122"/>
@@ -5981,7 +5662,7 @@
             <a:r>
               <a:rPr lang="en-US" sz="1400" dirty="0">
                 <a:solidFill>
-                  <a:srgbClr val="E6EDF3"/>
+                  <a:srgbClr val="1F2937"/>
                 </a:solidFill>
                 <a:latin typeface="Calibri" pitchFamily="34" charset="0"/>
                 <a:ea typeface="Calibri" pitchFamily="34" charset="-122"/>
@@ -6002,7 +5683,7 @@
             <a:r>
               <a:rPr lang="en-US" sz="1400" dirty="0">
                 <a:solidFill>
-                  <a:srgbClr val="E6EDF3"/>
+                  <a:srgbClr val="1F2937"/>
                 </a:solidFill>
                 <a:latin typeface="Calibri" pitchFamily="34" charset="0"/>
                 <a:ea typeface="Calibri" pitchFamily="34" charset="-122"/>
@@ -6023,7 +5704,7 @@
             <a:r>
               <a:rPr lang="en-US" sz="1400" dirty="0">
                 <a:solidFill>
-                  <a:srgbClr val="E6EDF3"/>
+                  <a:srgbClr val="1F2937"/>
                 </a:solidFill>
                 <a:latin typeface="Calibri" pitchFamily="34" charset="0"/>
                 <a:ea typeface="Calibri" pitchFamily="34" charset="-122"/>
@@ -6062,7 +5743,7 @@
             <a:r>
               <a:rPr lang="en-US" sz="900" dirty="0">
                 <a:solidFill>
-                  <a:srgbClr val="94A3B8"/>
+                  <a:srgbClr val="64748B"/>
                 </a:solidFill>
                 <a:latin typeface="Calibri" pitchFamily="34" charset="0"/>
                 <a:ea typeface="Calibri" pitchFamily="34" charset="-122"/>
@@ -6074,38 +5755,9 @@
           </a:p>
         </p:txBody>
       </p:sp>
-      <p:sp>
-        <p:nvSpPr>
-          <p:cNvPr id="8" name="Shape 5"/>
-          <p:cNvSpPr/>
-          <p:nvPr/>
-        </p:nvSpPr>
-        <p:spPr>
-          <a:xfrm>
-            <a:off x="7772400" y="4590288"/>
-            <a:ext cx="969264" cy="475488"/>
-          </a:xfrm>
-          <a:prstGeom prst="roundRect">
-            <a:avLst>
-              <a:gd name="adj" fmla="val 11538"/>
-            </a:avLst>
-          </a:prstGeom>
-          <a:solidFill>
-            <a:srgbClr val="FFFFFF"/>
-          </a:solidFill>
-          <a:ln/>
-          <a:effectLst>
-            <a:outerShdw sx="100000" sy="100000" kx="0" ky="0" algn="bl" rotWithShape="0" blurRad="101600" dist="38100" dir="5400000">
-              <a:srgbClr val="000000">
-                <a:alpha val="35000"/>
-              </a:srgbClr>
-            </a:outerShdw>
-          </a:effectLst>
-        </p:spPr>
-      </p:sp>
       <p:pic>
         <p:nvPicPr>
-          <p:cNvPr id="9" name="Image 1" descr="/Users/pop7/Library/CloudStorage/OneDrive-MonsterConnectCo.,Ltd/Lecture/KOSEN69 - software-security/slides/pptx/assets/logo-small.png">    </p:cNvPr>
+          <p:cNvPr id="8" name="Image 1" descr="/Users/pop7/Library/CloudStorage/OneDrive-MonsterConnectCo.,Ltd/Lecture/KOSEN69 - software-security/slides/pptx/assets/logo-small.png">    </p:cNvPr>
           <p:cNvPicPr>
             <a:picLocks noChangeAspect="1"/>
           </p:cNvPicPr>
@@ -6119,7 +5771,7 @@
         </p:blipFill>
         <p:spPr>
           <a:xfrm>
-            <a:off x="7872984" y="4681728"/>
+            <a:off x="7882128" y="4700016"/>
             <a:ext cx="768096" cy="356616"/>
           </a:xfrm>
           <a:prstGeom prst="rect">
@@ -6141,7 +5793,7 @@
     <p:bg>
       <p:bgPr>
         <a:solidFill>
-          <a:srgbClr val="0E1726"/>
+          <a:srgbClr val="FFFFFF"/>
         </a:solidFill>
       </p:bgPr>
     </p:bg>
@@ -6178,9 +5830,9 @@
           </a:solidFill>
           <a:ln/>
           <a:effectLst>
-            <a:outerShdw sx="100000" sy="100000" kx="0" ky="0" algn="bl" rotWithShape="0" blurRad="101600" dist="38100" dir="5400000">
+            <a:outerShdw sx="100000" sy="100000" kx="0" ky="0" algn="bl" rotWithShape="0" blurRad="76200" dist="25400" dir="5400000">
               <a:srgbClr val="000000">
-                <a:alpha val="35000"/>
+                <a:alpha val="12000"/>
               </a:srgbClr>
             </a:outerShdw>
           </a:effectLst>
@@ -6237,7 +5889,7 @@
             <a:r>
               <a:rPr lang="en-US" sz="2600" b="1" dirty="0">
                 <a:solidFill>
-                  <a:srgbClr val="E6EDF3"/>
+                  <a:srgbClr val="1F2937"/>
                 </a:solidFill>
                 <a:latin typeface="Arial" pitchFamily="34" charset="0"/>
                 <a:ea typeface="Arial" pitchFamily="34" charset="-122"/>
@@ -6266,13 +5918,13 @@
             </a:avLst>
           </a:prstGeom>
           <a:solidFill>
-            <a:srgbClr val="18243A"/>
+            <a:srgbClr val="F1F5F9"/>
           </a:solidFill>
           <a:ln/>
           <a:effectLst>
-            <a:outerShdw sx="100000" sy="100000" kx="0" ky="0" algn="bl" rotWithShape="0" blurRad="101600" dist="38100" dir="5400000">
+            <a:outerShdw sx="100000" sy="100000" kx="0" ky="0" algn="bl" rotWithShape="0" blurRad="76200" dist="25400" dir="5400000">
               <a:srgbClr val="000000">
-                <a:alpha val="35000"/>
+                <a:alpha val="12000"/>
               </a:srgbClr>
             </a:outerShdw>
           </a:effectLst>
@@ -6309,7 +5961,7 @@
             <a:r>
               <a:rPr lang="en-US" sz="1400" dirty="0">
                 <a:solidFill>
-                  <a:srgbClr val="E6EDF3"/>
+                  <a:srgbClr val="1F2937"/>
                 </a:solidFill>
                 <a:latin typeface="Calibri" pitchFamily="34" charset="0"/>
                 <a:ea typeface="Calibri" pitchFamily="34" charset="-122"/>
@@ -6330,7 +5982,7 @@
             <a:r>
               <a:rPr lang="en-US" sz="1400" dirty="0">
                 <a:solidFill>
-                  <a:srgbClr val="E6EDF3"/>
+                  <a:srgbClr val="1F2937"/>
                 </a:solidFill>
                 <a:latin typeface="Calibri" pitchFamily="34" charset="0"/>
                 <a:ea typeface="Calibri" pitchFamily="34" charset="-122"/>
@@ -6351,7 +6003,7 @@
             <a:r>
               <a:rPr lang="en-US" sz="1400" dirty="0">
                 <a:solidFill>
-                  <a:srgbClr val="E6EDF3"/>
+                  <a:srgbClr val="1F2937"/>
                 </a:solidFill>
                 <a:latin typeface="Calibri" pitchFamily="34" charset="0"/>
                 <a:ea typeface="Calibri" pitchFamily="34" charset="-122"/>
@@ -6390,7 +6042,7 @@
             <a:r>
               <a:rPr lang="en-US" sz="900" dirty="0">
                 <a:solidFill>
-                  <a:srgbClr val="94A3B8"/>
+                  <a:srgbClr val="64748B"/>
                 </a:solidFill>
                 <a:latin typeface="Calibri" pitchFamily="34" charset="0"/>
                 <a:ea typeface="Calibri" pitchFamily="34" charset="-122"/>
@@ -6402,38 +6054,9 @@
           </a:p>
         </p:txBody>
       </p:sp>
-      <p:sp>
-        <p:nvSpPr>
-          <p:cNvPr id="8" name="Shape 5"/>
-          <p:cNvSpPr/>
-          <p:nvPr/>
-        </p:nvSpPr>
-        <p:spPr>
-          <a:xfrm>
-            <a:off x="7772400" y="4590288"/>
-            <a:ext cx="969264" cy="475488"/>
-          </a:xfrm>
-          <a:prstGeom prst="roundRect">
-            <a:avLst>
-              <a:gd name="adj" fmla="val 11538"/>
-            </a:avLst>
-          </a:prstGeom>
-          <a:solidFill>
-            <a:srgbClr val="FFFFFF"/>
-          </a:solidFill>
-          <a:ln/>
-          <a:effectLst>
-            <a:outerShdw sx="100000" sy="100000" kx="0" ky="0" algn="bl" rotWithShape="0" blurRad="101600" dist="38100" dir="5400000">
-              <a:srgbClr val="000000">
-                <a:alpha val="35000"/>
-              </a:srgbClr>
-            </a:outerShdw>
-          </a:effectLst>
-        </p:spPr>
-      </p:sp>
       <p:pic>
         <p:nvPicPr>
-          <p:cNvPr id="9" name="Image 1" descr="/Users/pop7/Library/CloudStorage/OneDrive-MonsterConnectCo.,Ltd/Lecture/KOSEN69 - software-security/slides/pptx/assets/logo-small.png">    </p:cNvPr>
+          <p:cNvPr id="8" name="Image 1" descr="/Users/pop7/Library/CloudStorage/OneDrive-MonsterConnectCo.,Ltd/Lecture/KOSEN69 - software-security/slides/pptx/assets/logo-small.png">    </p:cNvPr>
           <p:cNvPicPr>
             <a:picLocks noChangeAspect="1"/>
           </p:cNvPicPr>
@@ -6447,7 +6070,7 @@
         </p:blipFill>
         <p:spPr>
           <a:xfrm>
-            <a:off x="7872984" y="4681728"/>
+            <a:off x="7882128" y="4700016"/>
             <a:ext cx="768096" cy="356616"/>
           </a:xfrm>
           <a:prstGeom prst="rect">

--- a/slides/pptx/week11.pptx
+++ b/slides/pptx/week11.pptx
@@ -514,7 +514,7 @@
           <a:p>
             <a:r>
               <a:rPr lang="en-US" dirty="0"/>
-              <a:t/>
+              <a:t>Hook: feed random bytes to a C program until it crashes, then turn that crash into "execute my code." This week is the closest to classic hacking — and to why the world is moving to Rust. ~2 min.</a:t>
             </a:r>
             <a:endParaRPr lang="en-US" dirty="0"/>
           </a:p>
@@ -602,7 +602,7 @@
           <a:p>
             <a:r>
               <a:rPr lang="en-US" dirty="0"/>
-              <a:t/>
+              <a:t>Explain the 3 rounds before lab. Round 1 = instant feedback (it crashes or not). Round 3 (defend + Rust rewrite) is graded and the real lesson. Q6 of the quiz asks for the crashing input + the defense. ~3 min.</a:t>
             </a:r>
             <a:endParaRPr lang="en-US" dirty="0"/>
           </a:p>
@@ -690,7 +690,7 @@
           <a:p>
             <a:r>
               <a:rPr lang="en-US" dirty="0"/>
-              <a:t/>
+              <a:t>The Rust rewrite + "why it's now impossible" is the key deliverable — it proves they understand the cure, not just the exploit. AI-resilient tasks count.</a:t>
             </a:r>
             <a:endParaRPr lang="en-US" dirty="0"/>
           </a:p>
@@ -778,7 +778,7 @@
           <a:p>
             <a:r>
               <a:rPr lang="en-US" dirty="0"/>
-              <a:t/>
+              <a:t>Recap. Cold-call: "why aren't stack canaries enough?" (they detect, don't prevent; bypassable via leaks — the cure is memory safety). ~2 min.</a:t>
             </a:r>
             <a:endParaRPr lang="en-US" dirty="0"/>
           </a:p>
@@ -866,7 +866,7 @@
           <a:p>
             <a:r>
               <a:rPr lang="en-US" dirty="0"/>
-              <a:t/>
+              <a:t>Cliffhanger: "Next week — one poisoned dependency owns thousands of victims; we'll replay xz and SolarWinds-style attacks."</a:t>
             </a:r>
             <a:endParaRPr lang="en-US" dirty="0"/>
           </a:p>
@@ -954,7 +954,7 @@
           <a:p>
             <a:r>
               <a:rPr lang="en-US" dirty="0"/>
-              <a:t/>
+              <a:t>Roadmap, 1 min. Arc of the week: find (fuzz) → understand (debug) → exploit (pwn) → defend (mitigations) → cure (Rust). Lab follows the same arc.</a:t>
             </a:r>
             <a:endParaRPr lang="en-US" dirty="0"/>
           </a:p>
@@ -1042,7 +1042,7 @@
           <a:p>
             <a:r>
               <a:rPr lang="en-US" dirty="0"/>
-              <a:t/>
+              <a:t>Motivate hard. ~70% of Microsoft/Chrome severe CVEs are memory-safety bugs — that stat lands. It's now government policy (CISA Secure by Design, White House ONCD memory-safety report). This isn't legacy trivia; it's current. ~4 min.</a:t>
             </a:r>
             <a:endParaRPr lang="en-US" dirty="0"/>
           </a:p>
@@ -1130,7 +1130,7 @@
           <a:p>
             <a:r>
               <a:rPr lang="en-US" dirty="0"/>
-              <a:t/>
+              <a:t>The worked example — draw the stack on the board. A local buffer sits BELOW the saved return address; writing past the buffer marches upward into the return address. Control the return address = control where the CPU jumps next. This is THE concept of the week. ~8 min.</a:t>
             </a:r>
             <a:endParaRPr lang="en-US" dirty="0"/>
           </a:p>
@@ -1218,7 +1218,7 @@
           <a:p>
             <a:r>
               <a:rPr lang="en-US" dirty="0"/>
-              <a:t/>
+              <a:t>Map the family. Note these aren't only stack overflows — UAF (free then use) and format-string are just as exploitable. CWE-787 (out-of-bounds write) is consistently the top-1 in the CWE Top 25. ~3 min.</a:t>
             </a:r>
             <a:endParaRPr lang="en-US" dirty="0"/>
           </a:p>
@@ -1306,7 +1306,7 @@
           <a:p>
             <a:r>
               <a:rPr lang="en-US" dirty="0"/>
-              <a:t/>
+              <a:t>Connect to W2 fuzzing (now hands-on). Coverage-guided = the fuzzer mutates inputs and keeps the ones that reach NEW code, so it "learns" its way to deep bugs. ASan turns a silent corruption into a precise crash report. This is round 1 of the game. ~6 min.</a:t>
             </a:r>
             <a:endParaRPr lang="en-US" dirty="0"/>
           </a:p>
@@ -1394,7 +1394,7 @@
           <a:p>
             <a:r>
               <a:rPr lang="en-US" dirty="0"/>
-              <a:t/>
+              <a:t>Walk the exploit method. Cyclic pattern (De Bruijn) tells you EXACTLY how many bytes until the return address. Then overwrite it with the address of win(). Format string: %x leaks stack, %n writes — a primitive most students haven't seen. This is round 2 (pwn). ~6 min.</a:t>
             </a:r>
             <a:endParaRPr lang="en-US" dirty="0"/>
           </a:p>
@@ -1482,7 +1482,7 @@
           <a:p>
             <a:r>
               <a:rPr lang="en-US" dirty="0"/>
-              <a:t/>
+              <a:t>Each defense breaks one step of the previous slide: canary detects the overwrite, NX stops shellcode-on-stack, ASLR/PIE hide the addresses. Key honest point: they raise cost, they don't eliminate the bug — attackers chain leaks to defeat them. ~5 min.</a:t>
             </a:r>
             <a:endParaRPr lang="en-US" dirty="0"/>
           </a:p>
@@ -1570,7 +1570,7 @@
           <a:p>
             <a:r>
               <a:rPr lang="en-US" dirty="0"/>
-              <a:t/>
+              <a:t>The thesis of the week. Mitigations are a treadmill; memory-safe languages END the bug class. Rust's borrow checker makes UAF a compile error, not a CVE. This is exactly where industry + government are steering. ~4 min.</a:t>
             </a:r>
             <a:endParaRPr lang="en-US" dirty="0"/>
           </a:p>
@@ -2697,11 +2697,11 @@
         <p:spPr>
           <a:xfrm>
             <a:off x="457200" y="1325880"/>
-            <a:ext cx="8229600" cy="1207008"/>
+            <a:ext cx="8229600" cy="1517904"/>
           </a:xfrm>
           <a:prstGeom prst="roundRect">
             <a:avLst>
-              <a:gd name="adj" fmla="val 6061"/>
+              <a:gd name="adj" fmla="val 4819"/>
             </a:avLst>
           </a:prstGeom>
           <a:solidFill>
@@ -2726,7 +2726,7 @@
         <p:spPr>
           <a:xfrm>
             <a:off x="731520" y="1435608"/>
-            <a:ext cx="7680960" cy="987552"/>
+            <a:ext cx="7680960" cy="1298448"/>
           </a:xfrm>
           <a:prstGeom prst="rect">
             <a:avLst/>
@@ -2797,6 +2797,27 @@
                 <a:cs typeface="Calibri" pitchFamily="34" charset="-120"/>
               </a:rPr>
               <a:t>Memory-safe (Rust) rewrite + why the bug is now impossible</a:t>
+            </a:r>
+            <a:endParaRPr lang="en-US" sz="1400" dirty="0"/>
+          </a:p>
+          <a:p>
+            <a:pPr marL="342900" indent="-342900">
+              <a:spcAft>
+                <a:spcPts val="600"/>
+              </a:spcAft>
+              <a:buSzPct val="100000"/>
+              <a:buChar char="•"/>
+            </a:pPr>
+            <a:r>
+              <a:rPr lang="en-US" sz="1400" dirty="0">
+                <a:solidFill>
+                  <a:srgbClr val="1F2937"/>
+                </a:solidFill>
+                <a:latin typeface="Calibri" pitchFamily="34" charset="0"/>
+                <a:ea typeface="Calibri" pitchFamily="34" charset="-122"/>
+                <a:cs typeface="Calibri" pitchFamily="34" charset="-120"/>
+              </a:rPr>
+              <a:t>+ Audit the AI / EiPE / Prompt Problem (see worksheet)</a:t>
             </a:r>
             <a:endParaRPr lang="en-US" sz="1400" dirty="0"/>
           </a:p>

--- a/slides/pptx/week11.pptx
+++ b/slides/pptx/week11.pptx
@@ -2697,6 +2697,67 @@
         <p:spPr>
           <a:xfrm>
             <a:off x="457200" y="1325880"/>
+            <a:ext cx="8229600" cy="822960"/>
+          </a:xfrm>
+          <a:prstGeom prst="roundRect">
+            <a:avLst>
+              <a:gd name="adj" fmla="val 8889"/>
+            </a:avLst>
+          </a:prstGeom>
+          <a:solidFill>
+            <a:srgbClr val="E8EDF3"/>
+          </a:solidFill>
+          <a:ln/>
+        </p:spPr>
+      </p:sp>
+      <p:sp>
+        <p:nvSpPr>
+          <p:cNvPr id="6" name="Text 3"/>
+          <p:cNvSpPr/>
+          <p:nvPr/>
+        </p:nvSpPr>
+        <p:spPr>
+          <a:xfrm>
+            <a:off x="731520" y="1325880"/>
+            <a:ext cx="7680960" cy="822960"/>
+          </a:xfrm>
+          <a:prstGeom prst="rect">
+            <a:avLst/>
+          </a:prstGeom>
+          <a:noFill/>
+          <a:ln/>
+        </p:spPr>
+        <p:txBody>
+          <a:bodyPr wrap="square" lIns="0" tIns="0" rIns="0" bIns="0" rtlCol="0" anchor="ctr"/>
+          <a:lstStyle/>
+          <a:p>
+            <a:pPr indent="0" marL="0">
+              <a:buNone/>
+            </a:pPr>
+            <a:r>
+              <a:rPr lang="en-US" sz="1400" i="1" dirty="0">
+                <a:solidFill>
+                  <a:srgbClr val="E35205"/>
+                </a:solidFill>
+                <a:latin typeface="Calibri" pitchFamily="34" charset="0"/>
+                <a:ea typeface="Calibri" pitchFamily="34" charset="-122"/>
+                <a:cs typeface="Calibri" pitchFamily="34" charset="-120"/>
+              </a:rPr>
+              <a:t>📋 Worksheet 11 — labs/week11-memory-safety-exploitation/worksheet.md (Part 3) · kickoff: clang -fsanitize=address,fuzzer fuzz_harness.c -o fuzz &amp;&amp; ./fuzz (in the Linux VM)</a:t>
+            </a:r>
+            <a:endParaRPr lang="en-US" sz="1400" dirty="0"/>
+          </a:p>
+        </p:txBody>
+      </p:sp>
+      <p:sp>
+        <p:nvSpPr>
+          <p:cNvPr id="7" name="Shape 4"/>
+          <p:cNvSpPr/>
+          <p:nvPr/>
+        </p:nvSpPr>
+        <p:spPr>
+          <a:xfrm>
+            <a:off x="457200" y="2313432"/>
             <a:ext cx="8229600" cy="1517904"/>
           </a:xfrm>
           <a:prstGeom prst="roundRect">
@@ -2719,13 +2780,13 @@
       </p:sp>
       <p:sp>
         <p:nvSpPr>
-          <p:cNvPr id="6" name="Text 3"/>
-          <p:cNvSpPr/>
-          <p:nvPr/>
-        </p:nvSpPr>
-        <p:spPr>
-          <a:xfrm>
-            <a:off x="731520" y="1435608"/>
+          <p:cNvPr id="8" name="Text 5"/>
+          <p:cNvSpPr/>
+          <p:nvPr/>
+        </p:nvSpPr>
+        <p:spPr>
+          <a:xfrm>
+            <a:off x="731520" y="2423160"/>
             <a:ext cx="7680960" cy="1298448"/>
           </a:xfrm>
           <a:prstGeom prst="rect">
@@ -2825,7 +2886,7 @@
       </p:sp>
       <p:sp>
         <p:nvSpPr>
-          <p:cNvPr id="7" name="Text 4"/>
+          <p:cNvPr id="9" name="Text 6"/>
           <p:cNvSpPr/>
           <p:nvPr/>
         </p:nvSpPr>
@@ -2864,7 +2925,7 @@
       </p:sp>
       <p:pic>
         <p:nvPicPr>
-          <p:cNvPr id="8" name="Image 1" descr="/Users/pop7/Library/CloudStorage/OneDrive-MonsterConnectCo.,Ltd/Lecture/KOSEN69 - software-security/slides/pptx/assets/logo-small.png">    </p:cNvPr>
+          <p:cNvPr id="10" name="Image 1" descr="/Users/pop7/Library/CloudStorage/OneDrive-MonsterConnectCo.,Ltd/Lecture/KOSEN69 - software-security/slides/pptx/assets/logo-small.png">    </p:cNvPr>
           <p:cNvPicPr>
             <a:picLocks noChangeAspect="1"/>
           </p:cNvPicPr>

--- a/slides/pptx/week11.pptx
+++ b/slides/pptx/week11.pptx
@@ -2743,7 +2743,7 @@
                 <a:ea typeface="Calibri" pitchFamily="34" charset="-122"/>
                 <a:cs typeface="Calibri" pitchFamily="34" charset="-120"/>
               </a:rPr>
-              <a:t>📋 Worksheet 11 — labs/week11-memory-safety-exploitation/worksheet.md (Part 3) · kickoff: clang -fsanitize=address,fuzzer fuzz_harness.c -o fuzz &amp;&amp; ./fuzz (in the Linux VM)</a:t>
+              <a:t>📋 Worksheet 11 — labs/week11-memory-safety-exploitation/worksheet.md (Part 3) · kickoff: in the toolbox container (labs/toolbox): clang -fsanitize=address,fuzzer fuzz_harness.c -o fuzz &amp;&amp; ./fuzz</a:t>
             </a:r>
             <a:endParaRPr lang="en-US" sz="1400" dirty="0"/>
           </a:p>
